--- a/PARADISE_presentatie/PARADISE_kortrijk_kerngezond.pptx
+++ b/PARADISE_presentatie/PARADISE_kortrijk_kerngezond.pptx
@@ -1197,7 +1197,7 @@
           </a:p>
           <a:p>
             <a:r>
-              <a:t>Dit is een zool met negenennegentig kleine voelertjes erin. Ze gaat gewoon in je eigen schoen, en een kastje aan je been stuurt alles door naar de laptop. Honderd metingen per seconde, terwijl je wandelt. Na één minuutje weten we waar het knelt.</a:t>
+              <a:t>Dit is een zool met negenennegentig kleine sensoren erin. Ze gaat gewoon in je eigen schoen, en een kastje aan je been stuurt alles door naar de laptop. Honderd metingen per seconde, terwijl je wandelt. Na één minuutje weten we waar het knelt.</a:t>
             </a:r>
           </a:p>
           <a:p/>
@@ -1294,7 +1294,7 @@
           </a:p>
           <a:p>
             <a:r>
-              <a:t>Kijk even. Elk vierkantje is één voelertje, en hoe roder het is, hoe harder de voet daar duwt. Hier staat driehonderdtwaalf op de bal van de voet — alles boven tweehonderd is te veel. Precies daar ontstaat een wonde.</a:t>
+              <a:t>Kijk even. Elk vierkantje is één sensor, en hoe roder het is, hoe harder de voet daar duwt. Hier staat driehonderdtwaalf op de bal van de voet — alles boven tweehonderd is te veel. Precies daar ontstaat een wonde.</a:t>
             </a:r>
           </a:p>
           <a:p/>
@@ -19883,7 +19883,7 @@
                 </a:solidFill>
                 <a:latin typeface="Consolas"/>
               </a:rPr>
-              <a:t>VOELERTJES</a:t>
+              <a:t>SENSOREN</a:t>
             </a:r>
           </a:p>
         </p:txBody>
@@ -28916,7 +28916,7 @@
                 </a:solidFill>
                 <a:latin typeface="Consolas"/>
               </a:rPr>
-              <a:t>99 voelertjes</a:t>
+              <a:t>99 sensoren</a:t>
             </a:r>
           </a:p>
         </p:txBody>
@@ -48333,7 +48333,7 @@
                 </a:solidFill>
                 <a:latin typeface="Segoe UI"/>
               </a:rPr>
-              <a:t>Elk vierkantje is één voelertje. Hoe roder, hoe harder de voet daar duwt.</a:t>
+              <a:t>Elk vierkantje is één sensor. Hoe roder, hoe harder de voet daar duwt.</a:t>
             </a:r>
           </a:p>
           <a:p>
